--- a/prj_fin/records/design/poster_styles/poster_amd_template.pptx
+++ b/prj_fin/records/design/poster_styles/poster_amd_template.pptx
@@ -3122,7 +3122,7 @@
                 </a:solidFill>
                 <a:latin typeface="Arial"/>
               </a:rPr>
-              <a:t>(c) 2026 Uie  |  AMD FPGA Innovation Design Competition</a:t>
+              <a:t>(c) 2026 Uie_Team  |  AMD FPGA Innovation Design Competition</a:t>
             </a:r>
           </a:p>
         </p:txBody>
@@ -3239,7 +3239,7 @@
                 </a:solidFill>
                 <a:latin typeface="Microsoft YaHei"/>
               </a:rPr>
-              <a:t>多源视频流多效果变换处理系统</a:t>
+              <a:t>多源视频同帧对照处理系统</a:t>
             </a:r>
           </a:p>
         </p:txBody>
@@ -3278,7 +3278,7 @@
                 </a:solidFill>
                 <a:latin typeface="Times New Roman"/>
               </a:rPr>
-              <a:t>Team Member: </a:t>
+              <a:t>Team: </a:t>
             </a:r>
             <a:r>
               <a:rPr sz="1050" b="0">
@@ -3287,7 +3287,7 @@
                 </a:solidFill>
                 <a:latin typeface="Times New Roman"/>
               </a:rPr>
-              <a:t>Uie  ·  Hunan University of Technology (湖南工业大学), Hunan Province</a:t>
+              <a:t>Uie_Team  ·  Hunan University of Technology (湖南工业大学), Hunan Province</a:t>
             </a:r>
           </a:p>
         </p:txBody>

--- a/prj_fin/records/design/poster_styles/poster_amd_template.pptx
+++ b/prj_fin/records/design/poster_styles/poster_amd_template.pptx
@@ -3252,8 +3252,8 @@
         </p:nvSpPr>
         <p:spPr>
           <a:xfrm>
-            <a:off x="402336" y="1307592"/>
-            <a:ext cx="7589520" cy="347472"/>
+            <a:off x="402336" y="1271016"/>
+            <a:ext cx="7589520" cy="210312"/>
           </a:xfrm>
           <a:prstGeom prst="rect">
             <a:avLst/>
@@ -3272,7 +3272,7 @@
               </a:lnSpc>
             </a:pPr>
             <a:r>
-              <a:rPr sz="1050" b="1">
+              <a:rPr sz="1000" b="1">
                 <a:solidFill>
                   <a:srgbClr val="202020"/>
                 </a:solidFill>
@@ -3281,20 +3281,68 @@
               <a:t>Team: </a:t>
             </a:r>
             <a:r>
-              <a:rPr sz="1050" b="0">
+              <a:rPr sz="1000" b="0">
                 <a:solidFill>
                   <a:srgbClr val="202020"/>
                 </a:solidFill>
                 <a:latin typeface="Times New Roman"/>
               </a:rPr>
-              <a:t>Uie_Team  ·  Hunan University of Technology (湖南工业大学), Hunan Province</a:t>
+              <a:t>Uie_Team  ·  Member: Wang Xu (王旭)</a:t>
+            </a:r>
+          </a:p>
+        </p:txBody>
+      </p:sp>
+      <p:sp>
+        <p:nvSpPr>
+          <p:cNvPr id="7" name="TextBox 6"/>
+          <p:cNvSpPr txBox="1"/>
+          <p:nvPr/>
+        </p:nvSpPr>
+        <p:spPr>
+          <a:xfrm>
+            <a:off x="402336" y="1490472"/>
+            <a:ext cx="7589520" cy="201168"/>
+          </a:xfrm>
+          <a:prstGeom prst="rect">
+            <a:avLst/>
+          </a:prstGeom>
+          <a:noFill/>
+        </p:spPr>
+        <p:txBody>
+          <a:bodyPr wrap="square" lIns="0" rIns="0" tIns="0" bIns="0" anchor="t">
+            <a:spAutoFit/>
+          </a:bodyPr>
+          <a:lstStyle/>
+          <a:p>
+            <a:pPr algn="l">
+              <a:lnSpc>
+                <a:spcPct val="100000"/>
+              </a:lnSpc>
+            </a:pPr>
+            <a:r>
+              <a:rPr sz="950" b="1">
+                <a:solidFill>
+                  <a:srgbClr val="202020"/>
+                </a:solidFill>
+                <a:latin typeface="Times New Roman"/>
+              </a:rPr>
+              <a:t>Advisors: </a:t>
+            </a:r>
+            <a:r>
+              <a:rPr sz="950" b="0">
+                <a:solidFill>
+                  <a:srgbClr val="202020"/>
+                </a:solidFill>
+                <a:latin typeface="Times New Roman"/>
+              </a:rPr>
+              <a:t>Tan Huisheng (谭会生), Liang Jiaojiao (梁娇娇)</a:t>
             </a:r>
           </a:p>
         </p:txBody>
       </p:sp>
       <p:pic>
         <p:nvPicPr>
-          <p:cNvPr id="7" name="Picture 6" descr="hut_emblem.png"/>
+          <p:cNvPr id="8" name="Picture 7" descr="hut_emblem.png"/>
           <p:cNvPicPr>
             <a:picLocks noChangeAspect="1"/>
           </p:cNvPicPr>
@@ -3318,7 +3366,7 @@
       </p:pic>
       <p:sp>
         <p:nvSpPr>
-          <p:cNvPr id="8" name="TextBox 7"/>
+          <p:cNvPr id="9" name="TextBox 8"/>
           <p:cNvSpPr txBox="1"/>
           <p:nvPr/>
         </p:nvSpPr>
@@ -3357,7 +3405,7 @@
       </p:sp>
       <p:sp>
         <p:nvSpPr>
-          <p:cNvPr id="9" name="TextBox 8"/>
+          <p:cNvPr id="10" name="TextBox 9"/>
           <p:cNvSpPr txBox="1"/>
           <p:nvPr/>
         </p:nvSpPr>
@@ -3397,7 +3445,7 @@
       </p:sp>
       <p:pic>
         <p:nvPicPr>
-          <p:cNvPr id="10" name="Picture 9" descr="amd_logo_black.png"/>
+          <p:cNvPr id="11" name="Picture 10" descr="amd_logo_black.png"/>
           <p:cNvPicPr>
             <a:picLocks noChangeAspect="1"/>
           </p:cNvPicPr>
@@ -3421,7 +3469,7 @@
       </p:pic>
       <p:sp>
         <p:nvSpPr>
-          <p:cNvPr id="11" name="TextBox 10"/>
+          <p:cNvPr id="12" name="TextBox 11"/>
           <p:cNvSpPr txBox="1"/>
           <p:nvPr/>
         </p:nvSpPr>
@@ -3460,7 +3508,7 @@
       </p:sp>
       <p:pic>
         <p:nvPicPr>
-          <p:cNvPr id="12" name="Picture 11" descr="poster_board.jpg"/>
+          <p:cNvPr id="13" name="Picture 12" descr="poster_board.jpg"/>
           <p:cNvPicPr>
             <a:picLocks noChangeAspect="1"/>
           </p:cNvPicPr>
@@ -3484,7 +3532,7 @@
       </p:pic>
       <p:sp>
         <p:nvSpPr>
-          <p:cNvPr id="13" name="TextBox 12"/>
+          <p:cNvPr id="14" name="TextBox 13"/>
           <p:cNvSpPr txBox="1"/>
           <p:nvPr/>
         </p:nvSpPr>
@@ -3524,7 +3572,7 @@
       </p:sp>
       <p:cxnSp>
         <p:nvCxnSpPr>
-          <p:cNvPr id="14" name="Connector 13"/>
+          <p:cNvPr id="15" name="Connector 14"/>
           <p:cNvCxnSpPr/>
           <p:nvPr/>
         </p:nvCxnSpPr>
@@ -3559,7 +3607,7 @@
       </p:cxnSp>
       <p:sp>
         <p:nvSpPr>
-          <p:cNvPr id="15" name="Rectangle 14"/>
+          <p:cNvPr id="16" name="Rectangle 15"/>
           <p:cNvSpPr/>
           <p:nvPr/>
         </p:nvSpPr>
@@ -3611,7 +3659,7 @@
       </p:sp>
       <p:sp>
         <p:nvSpPr>
-          <p:cNvPr id="16" name="TextBox 15"/>
+          <p:cNvPr id="17" name="TextBox 16"/>
           <p:cNvSpPr txBox="1"/>
           <p:nvPr/>
         </p:nvSpPr>
@@ -3650,7 +3698,7 @@
       </p:sp>
       <p:pic>
         <p:nvPicPr>
-          <p:cNvPr id="17" name="Picture 16" descr="poster_frame_split.png"/>
+          <p:cNvPr id="18" name="Picture 17" descr="poster_frame_split.png"/>
           <p:cNvPicPr>
             <a:picLocks noChangeAspect="1"/>
           </p:cNvPicPr>
@@ -3674,7 +3722,7 @@
       </p:pic>
       <p:sp>
         <p:nvSpPr>
-          <p:cNvPr id="18" name="TextBox 17"/>
+          <p:cNvPr id="19" name="TextBox 18"/>
           <p:cNvSpPr txBox="1"/>
           <p:nvPr/>
         </p:nvSpPr>
@@ -3713,7 +3761,7 @@
       </p:sp>
       <p:sp>
         <p:nvSpPr>
-          <p:cNvPr id="19" name="TextBox 18"/>
+          <p:cNvPr id="20" name="TextBox 19"/>
           <p:cNvSpPr txBox="1"/>
           <p:nvPr/>
         </p:nvSpPr>
@@ -3752,7 +3800,7 @@
       </p:sp>
       <p:sp>
         <p:nvSpPr>
-          <p:cNvPr id="20" name="TextBox 19"/>
+          <p:cNvPr id="21" name="TextBox 20"/>
           <p:cNvSpPr txBox="1"/>
           <p:nvPr/>
         </p:nvSpPr>
@@ -3793,7 +3841,7 @@
       </p:sp>
       <p:sp>
         <p:nvSpPr>
-          <p:cNvPr id="21" name="Rectangle 20"/>
+          <p:cNvPr id="22" name="Rectangle 21"/>
           <p:cNvSpPr/>
           <p:nvPr/>
         </p:nvSpPr>
@@ -3845,7 +3893,7 @@
       </p:sp>
       <p:pic>
         <p:nvPicPr>
-          <p:cNvPr id="22" name="Picture 21" descr="poster_arch.png"/>
+          <p:cNvPr id="23" name="Picture 22" descr="poster_arch.png"/>
           <p:cNvPicPr>
             <a:picLocks noChangeAspect="1"/>
           </p:cNvPicPr>
@@ -3869,7 +3917,7 @@
       </p:pic>
       <p:sp>
         <p:nvSpPr>
-          <p:cNvPr id="23" name="TextBox 22"/>
+          <p:cNvPr id="24" name="TextBox 23"/>
           <p:cNvSpPr txBox="1"/>
           <p:nvPr/>
         </p:nvSpPr>
@@ -3908,7 +3956,7 @@
       </p:sp>
       <p:sp>
         <p:nvSpPr>
-          <p:cNvPr id="24" name="Rounded Rectangle 23"/>
+          <p:cNvPr id="25" name="Rounded Rectangle 24"/>
           <p:cNvSpPr/>
           <p:nvPr/>
         </p:nvSpPr>
@@ -3984,7 +4032,7 @@
       </p:sp>
       <p:sp>
         <p:nvSpPr>
-          <p:cNvPr id="25" name="Rounded Rectangle 24"/>
+          <p:cNvPr id="26" name="Rounded Rectangle 25"/>
           <p:cNvSpPr/>
           <p:nvPr/>
         </p:nvSpPr>
@@ -4060,7 +4108,7 @@
       </p:sp>
       <p:sp>
         <p:nvSpPr>
-          <p:cNvPr id="26" name="Rectangle 25"/>
+          <p:cNvPr id="27" name="Rectangle 26"/>
           <p:cNvSpPr/>
           <p:nvPr/>
         </p:nvSpPr>
@@ -4112,7 +4160,7 @@
       </p:sp>
       <p:sp>
         <p:nvSpPr>
-          <p:cNvPr id="27" name="TextBox 26"/>
+          <p:cNvPr id="28" name="TextBox 27"/>
           <p:cNvSpPr txBox="1"/>
           <p:nvPr/>
         </p:nvSpPr>
@@ -4151,14 +4199,14 @@
       </p:sp>
       <p:sp>
         <p:nvSpPr>
-          <p:cNvPr id="28" name="Rectangle 27"/>
+          <p:cNvPr id="29" name="Rectangle 28"/>
           <p:cNvSpPr/>
           <p:nvPr/>
         </p:nvSpPr>
         <p:spPr>
           <a:xfrm>
             <a:off x="7955279" y="2880360"/>
-            <a:ext cx="3931920" cy="256032"/>
+            <a:ext cx="3931920" cy="228600"/>
           </a:xfrm>
           <a:prstGeom prst="rect">
             <a:avLst/>
@@ -4194,14 +4242,14 @@
       </p:sp>
       <p:sp>
         <p:nvSpPr>
-          <p:cNvPr id="29" name="TextBox 28"/>
+          <p:cNvPr id="30" name="TextBox 29"/>
           <p:cNvSpPr txBox="1"/>
           <p:nvPr/>
         </p:nvSpPr>
         <p:spPr>
           <a:xfrm>
-            <a:off x="8010144" y="2916936"/>
-            <a:ext cx="1234440" cy="182880"/>
+            <a:off x="8010144" y="2907791"/>
+            <a:ext cx="1234440" cy="173736"/>
           </a:xfrm>
           <a:prstGeom prst="rect">
             <a:avLst/>
@@ -4220,7 +4268,7 @@
               </a:lnSpc>
             </a:pPr>
             <a:r>
-              <a:rPr sz="819" b="1">
+              <a:rPr sz="800" b="1">
                 <a:solidFill>
                   <a:srgbClr val="5C5C5C"/>
                 </a:solidFill>
@@ -4233,14 +4281,14 @@
       </p:sp>
       <p:sp>
         <p:nvSpPr>
-          <p:cNvPr id="30" name="TextBox 29"/>
+          <p:cNvPr id="31" name="TextBox 30"/>
           <p:cNvSpPr txBox="1"/>
           <p:nvPr/>
         </p:nvSpPr>
         <p:spPr>
           <a:xfrm>
-            <a:off x="9235440" y="2916936"/>
-            <a:ext cx="2578608" cy="182880"/>
+            <a:off x="9235440" y="2907791"/>
+            <a:ext cx="2578608" cy="173736"/>
           </a:xfrm>
           <a:prstGeom prst="rect">
             <a:avLst/>
@@ -4259,7 +4307,7 @@
               </a:lnSpc>
             </a:pPr>
             <a:r>
-              <a:rPr sz="860" b="0">
+              <a:rPr sz="840" b="0">
                 <a:solidFill>
                   <a:srgbClr val="202020"/>
                 </a:solidFill>
@@ -4272,14 +4320,14 @@
       </p:sp>
       <p:sp>
         <p:nvSpPr>
-          <p:cNvPr id="31" name="Rectangle 30"/>
+          <p:cNvPr id="32" name="Rectangle 31"/>
           <p:cNvSpPr/>
           <p:nvPr/>
         </p:nvSpPr>
         <p:spPr>
           <a:xfrm>
-            <a:off x="7955279" y="3154679"/>
-            <a:ext cx="3931920" cy="256032"/>
+            <a:off x="7955279" y="3127248"/>
+            <a:ext cx="3931920" cy="228600"/>
           </a:xfrm>
           <a:prstGeom prst="rect">
             <a:avLst/>
@@ -4315,14 +4363,14 @@
       </p:sp>
       <p:sp>
         <p:nvSpPr>
-          <p:cNvPr id="32" name="TextBox 31"/>
+          <p:cNvPr id="33" name="TextBox 32"/>
           <p:cNvSpPr txBox="1"/>
           <p:nvPr/>
         </p:nvSpPr>
         <p:spPr>
           <a:xfrm>
-            <a:off x="8010144" y="3191256"/>
-            <a:ext cx="1234440" cy="182880"/>
+            <a:off x="8010144" y="3154679"/>
+            <a:ext cx="1234440" cy="173736"/>
           </a:xfrm>
           <a:prstGeom prst="rect">
             <a:avLst/>
@@ -4341,7 +4389,7 @@
               </a:lnSpc>
             </a:pPr>
             <a:r>
-              <a:rPr sz="819" b="1">
+              <a:rPr sz="800" b="1">
                 <a:solidFill>
                   <a:srgbClr val="5C5C5C"/>
                 </a:solidFill>
@@ -4354,14 +4402,14 @@
       </p:sp>
       <p:sp>
         <p:nvSpPr>
-          <p:cNvPr id="33" name="TextBox 32"/>
+          <p:cNvPr id="34" name="TextBox 33"/>
           <p:cNvSpPr txBox="1"/>
           <p:nvPr/>
         </p:nvSpPr>
         <p:spPr>
           <a:xfrm>
-            <a:off x="9235440" y="3191256"/>
-            <a:ext cx="2578608" cy="182880"/>
+            <a:off x="9235440" y="3154679"/>
+            <a:ext cx="2578608" cy="173736"/>
           </a:xfrm>
           <a:prstGeom prst="rect">
             <a:avLst/>
@@ -4380,7 +4428,7 @@
               </a:lnSpc>
             </a:pPr>
             <a:r>
-              <a:rPr sz="860" b="0">
+              <a:rPr sz="840" b="0">
                 <a:solidFill>
                   <a:srgbClr val="202020"/>
                 </a:solidFill>
@@ -4393,14 +4441,14 @@
       </p:sp>
       <p:sp>
         <p:nvSpPr>
-          <p:cNvPr id="34" name="Rectangle 33"/>
+          <p:cNvPr id="35" name="Rectangle 34"/>
           <p:cNvSpPr/>
           <p:nvPr/>
         </p:nvSpPr>
         <p:spPr>
           <a:xfrm>
-            <a:off x="7955279" y="3429000"/>
-            <a:ext cx="3931920" cy="256032"/>
+            <a:off x="7955279" y="3374136"/>
+            <a:ext cx="3931920" cy="228600"/>
           </a:xfrm>
           <a:prstGeom prst="rect">
             <a:avLst/>
@@ -4436,14 +4484,14 @@
       </p:sp>
       <p:sp>
         <p:nvSpPr>
-          <p:cNvPr id="35" name="TextBox 34"/>
+          <p:cNvPr id="36" name="TextBox 35"/>
           <p:cNvSpPr txBox="1"/>
           <p:nvPr/>
         </p:nvSpPr>
         <p:spPr>
           <a:xfrm>
-            <a:off x="8010144" y="3465576"/>
-            <a:ext cx="1234440" cy="182880"/>
+            <a:off x="8010144" y="3401568"/>
+            <a:ext cx="1234440" cy="173736"/>
           </a:xfrm>
           <a:prstGeom prst="rect">
             <a:avLst/>
@@ -4462,7 +4510,7 @@
               </a:lnSpc>
             </a:pPr>
             <a:r>
-              <a:rPr sz="819" b="1">
+              <a:rPr sz="800" b="1">
                 <a:solidFill>
                   <a:srgbClr val="5C5C5C"/>
                 </a:solidFill>
@@ -4475,14 +4523,14 @@
       </p:sp>
       <p:sp>
         <p:nvSpPr>
-          <p:cNvPr id="36" name="TextBox 35"/>
+          <p:cNvPr id="37" name="TextBox 36"/>
           <p:cNvSpPr txBox="1"/>
           <p:nvPr/>
         </p:nvSpPr>
         <p:spPr>
           <a:xfrm>
-            <a:off x="9235440" y="3465576"/>
-            <a:ext cx="2578608" cy="182880"/>
+            <a:off x="9235440" y="3401568"/>
+            <a:ext cx="2578608" cy="173736"/>
           </a:xfrm>
           <a:prstGeom prst="rect">
             <a:avLst/>
@@ -4501,7 +4549,7 @@
               </a:lnSpc>
             </a:pPr>
             <a:r>
-              <a:rPr sz="860" b="0">
+              <a:rPr sz="840" b="0">
                 <a:solidFill>
                   <a:srgbClr val="202020"/>
                 </a:solidFill>
@@ -4514,14 +4562,14 @@
       </p:sp>
       <p:sp>
         <p:nvSpPr>
-          <p:cNvPr id="37" name="Rectangle 36"/>
+          <p:cNvPr id="38" name="Rectangle 37"/>
           <p:cNvSpPr/>
           <p:nvPr/>
         </p:nvSpPr>
         <p:spPr>
           <a:xfrm>
-            <a:off x="7955279" y="3703320"/>
-            <a:ext cx="3931920" cy="256032"/>
+            <a:off x="7955279" y="3621024"/>
+            <a:ext cx="3931920" cy="228600"/>
           </a:xfrm>
           <a:prstGeom prst="rect">
             <a:avLst/>
@@ -4557,14 +4605,14 @@
       </p:sp>
       <p:sp>
         <p:nvSpPr>
-          <p:cNvPr id="38" name="TextBox 37"/>
+          <p:cNvPr id="39" name="TextBox 38"/>
           <p:cNvSpPr txBox="1"/>
           <p:nvPr/>
         </p:nvSpPr>
         <p:spPr>
           <a:xfrm>
-            <a:off x="8010144" y="3739896"/>
-            <a:ext cx="1234440" cy="182880"/>
+            <a:off x="8010144" y="3648456"/>
+            <a:ext cx="1234440" cy="173736"/>
           </a:xfrm>
           <a:prstGeom prst="rect">
             <a:avLst/>
@@ -4583,7 +4631,7 @@
               </a:lnSpc>
             </a:pPr>
             <a:r>
-              <a:rPr sz="819" b="1">
+              <a:rPr sz="800" b="1">
                 <a:solidFill>
                   <a:srgbClr val="5C5C5C"/>
                 </a:solidFill>
@@ -4596,14 +4644,14 @@
       </p:sp>
       <p:sp>
         <p:nvSpPr>
-          <p:cNvPr id="39" name="TextBox 38"/>
+          <p:cNvPr id="40" name="TextBox 39"/>
           <p:cNvSpPr txBox="1"/>
           <p:nvPr/>
         </p:nvSpPr>
         <p:spPr>
           <a:xfrm>
-            <a:off x="9235440" y="3739896"/>
-            <a:ext cx="2578608" cy="182880"/>
+            <a:off x="9235440" y="3648456"/>
+            <a:ext cx="2578608" cy="173736"/>
           </a:xfrm>
           <a:prstGeom prst="rect">
             <a:avLst/>
@@ -4622,7 +4670,7 @@
               </a:lnSpc>
             </a:pPr>
             <a:r>
-              <a:rPr sz="860" b="0">
+              <a:rPr sz="840" b="0">
                 <a:solidFill>
                   <a:srgbClr val="202020"/>
                 </a:solidFill>
@@ -4635,14 +4683,14 @@
       </p:sp>
       <p:sp>
         <p:nvSpPr>
-          <p:cNvPr id="40" name="Rectangle 39"/>
+          <p:cNvPr id="41" name="Rectangle 40"/>
           <p:cNvSpPr/>
           <p:nvPr/>
         </p:nvSpPr>
         <p:spPr>
           <a:xfrm>
-            <a:off x="7955279" y="3977639"/>
-            <a:ext cx="3931920" cy="256032"/>
+            <a:off x="7955279" y="3867912"/>
+            <a:ext cx="3931920" cy="228600"/>
           </a:xfrm>
           <a:prstGeom prst="rect">
             <a:avLst/>
@@ -4678,14 +4726,14 @@
       </p:sp>
       <p:sp>
         <p:nvSpPr>
-          <p:cNvPr id="41" name="TextBox 40"/>
+          <p:cNvPr id="42" name="TextBox 41"/>
           <p:cNvSpPr txBox="1"/>
           <p:nvPr/>
         </p:nvSpPr>
         <p:spPr>
           <a:xfrm>
-            <a:off x="8010144" y="4014215"/>
-            <a:ext cx="1234440" cy="182880"/>
+            <a:off x="8010144" y="3895344"/>
+            <a:ext cx="1234440" cy="173736"/>
           </a:xfrm>
           <a:prstGeom prst="rect">
             <a:avLst/>
@@ -4704,7 +4752,7 @@
               </a:lnSpc>
             </a:pPr>
             <a:r>
-              <a:rPr sz="819" b="1">
+              <a:rPr sz="800" b="1">
                 <a:solidFill>
                   <a:srgbClr val="5C5C5C"/>
                 </a:solidFill>
@@ -4717,14 +4765,14 @@
       </p:sp>
       <p:sp>
         <p:nvSpPr>
-          <p:cNvPr id="42" name="TextBox 41"/>
+          <p:cNvPr id="43" name="TextBox 42"/>
           <p:cNvSpPr txBox="1"/>
           <p:nvPr/>
         </p:nvSpPr>
         <p:spPr>
           <a:xfrm>
-            <a:off x="9235440" y="4014215"/>
-            <a:ext cx="2578608" cy="182880"/>
+            <a:off x="9235440" y="3895344"/>
+            <a:ext cx="2578608" cy="173736"/>
           </a:xfrm>
           <a:prstGeom prst="rect">
             <a:avLst/>
@@ -4743,7 +4791,7 @@
               </a:lnSpc>
             </a:pPr>
             <a:r>
-              <a:rPr sz="860" b="0">
+              <a:rPr sz="840" b="0">
                 <a:solidFill>
                   <a:srgbClr val="202020"/>
                 </a:solidFill>
@@ -4756,14 +4804,14 @@
       </p:sp>
       <p:sp>
         <p:nvSpPr>
-          <p:cNvPr id="43" name="Rectangle 42"/>
+          <p:cNvPr id="44" name="Rectangle 43"/>
           <p:cNvSpPr/>
           <p:nvPr/>
         </p:nvSpPr>
         <p:spPr>
           <a:xfrm>
-            <a:off x="7955279" y="4251960"/>
-            <a:ext cx="3931920" cy="256032"/>
+            <a:off x="7955279" y="4114800"/>
+            <a:ext cx="3931920" cy="228600"/>
           </a:xfrm>
           <a:prstGeom prst="rect">
             <a:avLst/>
@@ -4799,14 +4847,14 @@
       </p:sp>
       <p:sp>
         <p:nvSpPr>
-          <p:cNvPr id="44" name="TextBox 43"/>
+          <p:cNvPr id="45" name="TextBox 44"/>
           <p:cNvSpPr txBox="1"/>
           <p:nvPr/>
         </p:nvSpPr>
         <p:spPr>
           <a:xfrm>
-            <a:off x="8010144" y="4288536"/>
-            <a:ext cx="1234440" cy="182880"/>
+            <a:off x="8010144" y="4142232"/>
+            <a:ext cx="1234440" cy="173736"/>
           </a:xfrm>
           <a:prstGeom prst="rect">
             <a:avLst/>
@@ -4825,7 +4873,7 @@
               </a:lnSpc>
             </a:pPr>
             <a:r>
-              <a:rPr sz="819" b="1">
+              <a:rPr sz="800" b="1">
                 <a:solidFill>
                   <a:srgbClr val="5C5C5C"/>
                 </a:solidFill>
@@ -4838,14 +4886,14 @@
       </p:sp>
       <p:sp>
         <p:nvSpPr>
-          <p:cNvPr id="45" name="TextBox 44"/>
+          <p:cNvPr id="46" name="TextBox 45"/>
           <p:cNvSpPr txBox="1"/>
           <p:nvPr/>
         </p:nvSpPr>
         <p:spPr>
           <a:xfrm>
-            <a:off x="9235440" y="4288536"/>
-            <a:ext cx="2578608" cy="182880"/>
+            <a:off x="9235440" y="4142232"/>
+            <a:ext cx="2578608" cy="173736"/>
           </a:xfrm>
           <a:prstGeom prst="rect">
             <a:avLst/>
@@ -4864,7 +4912,7 @@
               </a:lnSpc>
             </a:pPr>
             <a:r>
-              <a:rPr sz="860" b="0">
+              <a:rPr sz="840" b="0">
                 <a:solidFill>
                   <a:srgbClr val="202020"/>
                 </a:solidFill>
@@ -4877,14 +4925,14 @@
       </p:sp>
       <p:sp>
         <p:nvSpPr>
-          <p:cNvPr id="46" name="Rectangle 45"/>
+          <p:cNvPr id="47" name="Rectangle 46"/>
           <p:cNvSpPr/>
           <p:nvPr/>
         </p:nvSpPr>
         <p:spPr>
           <a:xfrm>
-            <a:off x="7955279" y="4526279"/>
-            <a:ext cx="3931920" cy="256032"/>
+            <a:off x="7955279" y="4361688"/>
+            <a:ext cx="3931920" cy="228600"/>
           </a:xfrm>
           <a:prstGeom prst="rect">
             <a:avLst/>
@@ -4920,14 +4968,14 @@
       </p:sp>
       <p:sp>
         <p:nvSpPr>
-          <p:cNvPr id="47" name="TextBox 46"/>
+          <p:cNvPr id="48" name="TextBox 47"/>
           <p:cNvSpPr txBox="1"/>
           <p:nvPr/>
         </p:nvSpPr>
         <p:spPr>
           <a:xfrm>
-            <a:off x="8010144" y="4562855"/>
-            <a:ext cx="1234440" cy="182880"/>
+            <a:off x="8010144" y="4389120"/>
+            <a:ext cx="1234440" cy="173736"/>
           </a:xfrm>
           <a:prstGeom prst="rect">
             <a:avLst/>
@@ -4946,7 +4994,7 @@
               </a:lnSpc>
             </a:pPr>
             <a:r>
-              <a:rPr sz="819" b="1">
+              <a:rPr sz="800" b="1">
                 <a:solidFill>
                   <a:srgbClr val="5C5C5C"/>
                 </a:solidFill>
@@ -4959,14 +5007,14 @@
       </p:sp>
       <p:sp>
         <p:nvSpPr>
-          <p:cNvPr id="48" name="TextBox 47"/>
+          <p:cNvPr id="49" name="TextBox 48"/>
           <p:cNvSpPr txBox="1"/>
           <p:nvPr/>
         </p:nvSpPr>
         <p:spPr>
           <a:xfrm>
-            <a:off x="9235440" y="4562855"/>
-            <a:ext cx="2578608" cy="182880"/>
+            <a:off x="9235440" y="4389120"/>
+            <a:ext cx="2578608" cy="173736"/>
           </a:xfrm>
           <a:prstGeom prst="rect">
             <a:avLst/>
@@ -4985,7 +5033,7 @@
               </a:lnSpc>
             </a:pPr>
             <a:r>
-              <a:rPr sz="860" b="0">
+              <a:rPr sz="840" b="0">
                 <a:solidFill>
                   <a:srgbClr val="202020"/>
                 </a:solidFill>
@@ -4998,105 +5046,23 @@
       </p:sp>
       <p:sp>
         <p:nvSpPr>
-          <p:cNvPr id="49" name="TextBox 48"/>
-          <p:cNvSpPr txBox="1"/>
-          <p:nvPr/>
-        </p:nvSpPr>
-        <p:spPr>
-          <a:xfrm>
-            <a:off x="7955279" y="5010912"/>
-            <a:ext cx="3931920" cy="201168"/>
-          </a:xfrm>
-          <a:prstGeom prst="rect">
-            <a:avLst/>
-          </a:prstGeom>
-          <a:noFill/>
-        </p:spPr>
-        <p:txBody>
-          <a:bodyPr wrap="square" lIns="0" rIns="0" tIns="0" bIns="0" anchor="t">
-            <a:spAutoFit/>
-          </a:bodyPr>
-          <a:lstStyle/>
-          <a:p>
-            <a:pPr algn="l">
-              <a:lnSpc>
-                <a:spcPct val="100000"/>
-              </a:lnSpc>
-            </a:pPr>
-            <a:r>
-              <a:rPr sz="1050" b="1">
-                <a:solidFill>
-                  <a:srgbClr val="7A2D5E"/>
-                </a:solidFill>
-                <a:latin typeface="Arial Black"/>
-              </a:rPr>
-              <a:t>OBSERVABILITY</a:t>
-            </a:r>
-          </a:p>
-        </p:txBody>
-      </p:sp>
-      <p:sp>
-        <p:nvSpPr>
-          <p:cNvPr id="50" name="TextBox 49"/>
-          <p:cNvSpPr txBox="1"/>
-          <p:nvPr/>
-        </p:nvSpPr>
-        <p:spPr>
-          <a:xfrm>
-            <a:off x="7955279" y="5248656"/>
-            <a:ext cx="3931920" cy="621792"/>
-          </a:xfrm>
-          <a:prstGeom prst="rect">
-            <a:avLst/>
-          </a:prstGeom>
-          <a:noFill/>
-        </p:spPr>
-        <p:txBody>
-          <a:bodyPr wrap="square" lIns="0" rIns="0" tIns="0" bIns="0" anchor="t">
-            <a:spAutoFit/>
-          </a:bodyPr>
-          <a:lstStyle/>
-          <a:p>
-            <a:pPr algn="l">
-              <a:lnSpc>
-                <a:spcPct val="100000"/>
-              </a:lnSpc>
-            </a:pPr>
-            <a:r>
-              <a:rPr sz="860" b="0">
-                <a:solidFill>
-                  <a:srgbClr val="202020"/>
-                </a:solidFill>
-                <a:latin typeface="Times New Roman"/>
-              </a:rPr>
-              <a:t>link / 1 Hz UDP telemetry: aborts, rows_max, stall, gap_min/max and pane_bad. The same counters are readable over UART, JTAG and the wire.</a:t>
-            </a:r>
-          </a:p>
-        </p:txBody>
-      </p:sp>
-      <p:sp>
-        <p:nvSpPr>
-          <p:cNvPr id="51" name="Rounded Rectangle 50"/>
+          <p:cNvPr id="50" name="Rectangle 49"/>
           <p:cNvSpPr/>
           <p:nvPr/>
         </p:nvSpPr>
         <p:spPr>
           <a:xfrm>
-            <a:off x="7955279" y="5989320"/>
-            <a:ext cx="3931920" cy="384048"/>
-          </a:xfrm>
-          <a:prstGeom prst="roundRect">
-            <a:avLst>
-              <a:gd name="adj" fmla="val 15000"/>
-            </a:avLst>
+            <a:off x="7955279" y="4608576"/>
+            <a:ext cx="3931920" cy="228600"/>
+          </a:xfrm>
+          <a:prstGeom prst="rect">
+            <a:avLst/>
           </a:prstGeom>
           <a:solidFill>
-            <a:srgbClr val="F5ECF1"/>
+            <a:srgbClr val="FFFFFF"/>
           </a:solidFill>
-          <a:ln w="11430">
-            <a:solidFill>
-              <a:srgbClr val="7A2D5E"/>
-            </a:solidFill>
+          <a:ln>
+            <a:noFill/>
           </a:ln>
         </p:spPr>
         <p:style>
@@ -5114,12 +5080,215 @@
           </a:fontRef>
         </p:style>
         <p:txBody>
+          <a:bodyPr rtlCol="0" anchor="ctr"/>
+          <a:lstStyle/>
+          <a:p>
+            <a:pPr algn="ctr"/>
+          </a:p>
+        </p:txBody>
+      </p:sp>
+      <p:sp>
+        <p:nvSpPr>
+          <p:cNvPr id="51" name="TextBox 50"/>
+          <p:cNvSpPr txBox="1"/>
+          <p:nvPr/>
+        </p:nvSpPr>
+        <p:spPr>
+          <a:xfrm>
+            <a:off x="8010144" y="4636008"/>
+            <a:ext cx="1234440" cy="173736"/>
+          </a:xfrm>
+          <a:prstGeom prst="rect">
+            <a:avLst/>
+          </a:prstGeom>
+          <a:noFill/>
+        </p:spPr>
+        <p:txBody>
+          <a:bodyPr wrap="square" lIns="0" rIns="0" tIns="0" bIns="0" anchor="t">
+            <a:spAutoFit/>
+          </a:bodyPr>
+          <a:lstStyle/>
+          <a:p>
+            <a:pPr algn="l">
+              <a:lnSpc>
+                <a:spcPct val="100000"/>
+              </a:lnSpc>
+            </a:pPr>
+            <a:r>
+              <a:rPr sz="800" b="1">
+                <a:solidFill>
+                  <a:srgbClr val="5C5C5C"/>
+                </a:solidFill>
+                <a:latin typeface="Arial"/>
+              </a:rPr>
+              <a:t>LUT / FF / DSP</a:t>
+            </a:r>
+          </a:p>
+        </p:txBody>
+      </p:sp>
+      <p:sp>
+        <p:nvSpPr>
+          <p:cNvPr id="52" name="TextBox 51"/>
+          <p:cNvSpPr txBox="1"/>
+          <p:nvPr/>
+        </p:nvSpPr>
+        <p:spPr>
+          <a:xfrm>
+            <a:off x="9235440" y="4636008"/>
+            <a:ext cx="2578608" cy="173736"/>
+          </a:xfrm>
+          <a:prstGeom prst="rect">
+            <a:avLst/>
+          </a:prstGeom>
+          <a:noFill/>
+        </p:spPr>
+        <p:txBody>
+          <a:bodyPr wrap="square" lIns="0" rIns="0" tIns="0" bIns="0" anchor="t">
+            <a:spAutoFit/>
+          </a:bodyPr>
+          <a:lstStyle/>
+          <a:p>
+            <a:pPr algn="l">
+              <a:lnSpc>
+                <a:spcPct val="100000"/>
+              </a:lnSpc>
+            </a:pPr>
+            <a:r>
+              <a:rPr sz="840" b="0">
+                <a:solidFill>
+                  <a:srgbClr val="202020"/>
+                </a:solidFill>
+                <a:latin typeface="Arial"/>
+              </a:rPr>
+              <a:t>28.13 / 8.55 / 8.64 %</a:t>
+            </a:r>
+          </a:p>
+        </p:txBody>
+      </p:sp>
+      <p:sp>
+        <p:nvSpPr>
+          <p:cNvPr id="53" name="TextBox 52"/>
+          <p:cNvSpPr txBox="1"/>
+          <p:nvPr/>
+        </p:nvSpPr>
+        <p:spPr>
+          <a:xfrm>
+            <a:off x="7955279" y="4965192"/>
+            <a:ext cx="3931920" cy="201168"/>
+          </a:xfrm>
+          <a:prstGeom prst="rect">
+            <a:avLst/>
+          </a:prstGeom>
+          <a:noFill/>
+        </p:spPr>
+        <p:txBody>
+          <a:bodyPr wrap="square" lIns="0" rIns="0" tIns="0" bIns="0" anchor="t">
+            <a:spAutoFit/>
+          </a:bodyPr>
+          <a:lstStyle/>
+          <a:p>
+            <a:pPr algn="l">
+              <a:lnSpc>
+                <a:spcPct val="100000"/>
+              </a:lnSpc>
+            </a:pPr>
+            <a:r>
+              <a:rPr sz="1050" b="1">
+                <a:solidFill>
+                  <a:srgbClr val="7A2D5E"/>
+                </a:solidFill>
+                <a:latin typeface="Arial Black"/>
+              </a:rPr>
+              <a:t>OBSERVABILITY</a:t>
+            </a:r>
+          </a:p>
+        </p:txBody>
+      </p:sp>
+      <p:sp>
+        <p:nvSpPr>
+          <p:cNvPr id="54" name="TextBox 53"/>
+          <p:cNvSpPr txBox="1"/>
+          <p:nvPr/>
+        </p:nvSpPr>
+        <p:spPr>
+          <a:xfrm>
+            <a:off x="7955279" y="5193792"/>
+            <a:ext cx="3931920" cy="530352"/>
+          </a:xfrm>
+          <a:prstGeom prst="rect">
+            <a:avLst/>
+          </a:prstGeom>
+          <a:noFill/>
+        </p:spPr>
+        <p:txBody>
+          <a:bodyPr wrap="square" lIns="0" rIns="0" tIns="0" bIns="0" anchor="t">
+            <a:spAutoFit/>
+          </a:bodyPr>
+          <a:lstStyle/>
+          <a:p>
+            <a:pPr algn="l">
+              <a:lnSpc>
+                <a:spcPct val="100000"/>
+              </a:lnSpc>
+            </a:pPr>
+            <a:r>
+              <a:rPr sz="860" b="0">
+                <a:solidFill>
+                  <a:srgbClr val="202020"/>
+                </a:solidFill>
+                <a:latin typeface="Times New Roman"/>
+              </a:rPr>
+              <a:t>link / 1 Hz UDP telemetry: aborts, rows_max, stall, gap_min/max and pane_bad. The same counters are readable over UART, JTAG and the wire.</a:t>
+            </a:r>
+          </a:p>
+        </p:txBody>
+      </p:sp>
+      <p:sp>
+        <p:nvSpPr>
+          <p:cNvPr id="55" name="Rounded Rectangle 54"/>
+          <p:cNvSpPr/>
+          <p:nvPr/>
+        </p:nvSpPr>
+        <p:spPr>
+          <a:xfrm>
+            <a:off x="7955279" y="5797296"/>
+            <a:ext cx="3931920" cy="365760"/>
+          </a:xfrm>
+          <a:prstGeom prst="roundRect">
+            <a:avLst>
+              <a:gd name="adj" fmla="val 15000"/>
+            </a:avLst>
+          </a:prstGeom>
+          <a:solidFill>
+            <a:srgbClr val="F5ECF1"/>
+          </a:solidFill>
+          <a:ln w="11430">
+            <a:solidFill>
+              <a:srgbClr val="7A2D5E"/>
+            </a:solidFill>
+          </a:ln>
+        </p:spPr>
+        <p:style>
+          <a:lnRef idx="1">
+            <a:schemeClr val="accent1"/>
+          </a:lnRef>
+          <a:fillRef idx="3">
+            <a:schemeClr val="accent1"/>
+          </a:fillRef>
+          <a:effectRef idx="2">
+            <a:schemeClr val="accent1"/>
+          </a:effectRef>
+          <a:fontRef idx="minor">
+            <a:schemeClr val="lt1"/>
+          </a:fontRef>
+        </p:style>
+        <p:txBody>
           <a:bodyPr rtlCol="0" anchor="ctr" lIns="109728" tIns="0" bIns="0"/>
           <a:lstStyle/>
           <a:p>
             <a:pPr algn="ctr"/>
             <a:r>
-              <a:rPr sz="900" b="1">
+              <a:rPr sz="860" b="1">
                 <a:solidFill>
                   <a:srgbClr val="7A2D5E"/>
                 </a:solidFill>
@@ -5130,9 +5299,48 @@
           </a:p>
         </p:txBody>
       </p:sp>
+      <p:sp>
+        <p:nvSpPr>
+          <p:cNvPr id="56" name="TextBox 55"/>
+          <p:cNvSpPr txBox="1"/>
+          <p:nvPr/>
+        </p:nvSpPr>
+        <p:spPr>
+          <a:xfrm>
+            <a:off x="7955279" y="6254496"/>
+            <a:ext cx="3931920" cy="256032"/>
+          </a:xfrm>
+          <a:prstGeom prst="rect">
+            <a:avLst/>
+          </a:prstGeom>
+          <a:noFill/>
+        </p:spPr>
+        <p:txBody>
+          <a:bodyPr wrap="square" lIns="0" rIns="0" tIns="0" bIns="0" anchor="t">
+            <a:spAutoFit/>
+          </a:bodyPr>
+          <a:lstStyle/>
+          <a:p>
+            <a:pPr algn="l">
+              <a:lnSpc>
+                <a:spcPct val="100000"/>
+              </a:lnSpc>
+            </a:pPr>
+            <a:r>
+              <a:rPr sz="670" b="0">
+                <a:solidFill>
+                  <a:srgbClr val="5C5C5C"/>
+                </a:solidFill>
+                <a:latin typeface="Times New Roman"/>
+              </a:rPr>
+              <a:t>Conclusion: one frame, two panes, one wire-readable account.  Next: 1080p, dual-stream, close RGMII TX hold.</a:t>
+            </a:r>
+          </a:p>
+        </p:txBody>
+      </p:sp>
       <p:cxnSp>
         <p:nvCxnSpPr>
-          <p:cNvPr id="52" name="Connector 51"/>
+          <p:cNvPr id="57" name="Connector 56"/>
           <p:cNvCxnSpPr/>
           <p:nvPr/>
         </p:nvCxnSpPr>
@@ -5167,7 +5375,7 @@
       </p:cxnSp>
       <p:sp>
         <p:nvSpPr>
-          <p:cNvPr id="53" name="TextBox 52"/>
+          <p:cNvPr id="58" name="TextBox 57"/>
           <p:cNvSpPr txBox="1"/>
           <p:nvPr/>
         </p:nvSpPr>
@@ -5206,7 +5414,7 @@
       </p:sp>
       <p:pic>
         <p:nvPicPr>
-          <p:cNvPr id="54" name="Picture 53" descr="amd_logo_black.png"/>
+          <p:cNvPr id="59" name="Picture 58" descr="amd_logo_black.png"/>
           <p:cNvPicPr>
             <a:picLocks noChangeAspect="1"/>
           </p:cNvPicPr>

--- a/prj_fin/records/design/poster_styles/poster_amd_template.pptx
+++ b/prj_fin/records/design/poster_styles/poster_amd_template.pptx
@@ -3508,7 +3508,7 @@
       </p:sp>
       <p:pic>
         <p:nvPicPr>
-          <p:cNvPr id="13" name="Picture 12" descr="poster_board.jpg"/>
+          <p:cNvPr id="13" name="Picture 12" descr="poster_overview.jpg"/>
           <p:cNvPicPr>
             <a:picLocks noChangeAspect="1"/>
           </p:cNvPicPr>
@@ -3522,8 +3522,8 @@
         </p:blipFill>
         <p:spPr>
           <a:xfrm>
-            <a:off x="10195560" y="112268"/>
-            <a:ext cx="1737360" cy="1302510"/>
+            <a:off x="10058400" y="109728"/>
+            <a:ext cx="1828800" cy="914400"/>
           </a:xfrm>
           <a:prstGeom prst="rect">
             <a:avLst/>
@@ -3826,7 +3826,7 @@
               </a:lnSpc>
             </a:pPr>
             <a:r>
-              <a:rPr sz="670" b="0">
+              <a:rPr sz="700" b="0">
                 <a:solidFill>
                   <a:srgbClr val="202020"/>
                 </a:solidFill>
@@ -3893,7 +3893,7 @@
       </p:sp>
       <p:pic>
         <p:nvPicPr>
-          <p:cNvPr id="23" name="Picture 22" descr="poster_arch.png"/>
+          <p:cNvPr id="23" name="Picture 22" descr="poster_arch_simple.png"/>
           <p:cNvPicPr>
             <a:picLocks noChangeAspect="1"/>
           </p:cNvPicPr>
@@ -3907,8 +3907,8 @@
         </p:blipFill>
         <p:spPr>
           <a:xfrm>
-            <a:off x="3943694" y="2267712"/>
-            <a:ext cx="3771211" cy="1709928"/>
+            <a:off x="3948379" y="2267712"/>
+            <a:ext cx="3761841" cy="1709928"/>
           </a:xfrm>
           <a:prstGeom prst="rect">
             <a:avLst/>
@@ -3943,7 +3943,7 @@
               </a:lnSpc>
             </a:pPr>
             <a:r>
-              <a:rPr sz="700" b="0">
+              <a:rPr sz="680" b="0">
                 <a:solidFill>
                   <a:srgbClr val="5C5C5C"/>
                 </a:solidFill>
@@ -3956,27 +3956,23 @@
       </p:sp>
       <p:sp>
         <p:nvSpPr>
-          <p:cNvPr id="25" name="Rounded Rectangle 24"/>
+          <p:cNvPr id="25" name="Rectangle 24"/>
           <p:cNvSpPr/>
           <p:nvPr/>
         </p:nvSpPr>
         <p:spPr>
           <a:xfrm>
-            <a:off x="3931920" y="4389120"/>
-            <a:ext cx="3794760" cy="1005840"/>
-          </a:xfrm>
-          <a:prstGeom prst="roundRect">
-            <a:avLst>
-              <a:gd name="adj" fmla="val 8000"/>
-            </a:avLst>
+            <a:off x="3931920" y="4224528"/>
+            <a:ext cx="3794760" cy="274320"/>
+          </a:xfrm>
+          <a:prstGeom prst="rect">
+            <a:avLst/>
           </a:prstGeom>
           <a:solidFill>
-            <a:srgbClr val="FFFFFF"/>
+            <a:srgbClr val="1C1C1C"/>
           </a:solidFill>
-          <a:ln w="11430">
-            <a:solidFill>
-              <a:srgbClr val="AAAAAA"/>
-            </a:solidFill>
+          <a:ln>
+            <a:noFill/>
           </a:ln>
         </p:spPr>
         <p:style>
@@ -3994,38 +3990,18 @@
           </a:fontRef>
         </p:style>
         <p:txBody>
-          <a:bodyPr rtlCol="0" anchor="ctr" wrap="square" lIns="146304" rIns="128016" tIns="73152" bIns="54864"/>
-          <a:lstStyle/>
-          <a:p>
-            <a:pPr algn="ctr">
-              <a:spcAft>
-                <a:spcPts val="300"/>
-              </a:spcAft>
-            </a:pPr>
-            <a:r>
-              <a:rPr sz="1050" b="1">
-                <a:solidFill>
-                  <a:srgbClr val="7A2D5E"/>
-                </a:solidFill>
-                <a:latin typeface="Arial"/>
+          <a:bodyPr rtlCol="0" anchor="ctr" lIns="109728" rIns="73152" tIns="0" bIns="0"/>
+          <a:lstStyle/>
+          <a:p>
+            <a:pPr algn="l"/>
+            <a:r>
+              <a:rPr sz="1250" b="1">
+                <a:solidFill>
+                  <a:srgbClr val="FFFFFF"/>
+                </a:solidFill>
+                <a:latin typeface="Arial Black"/>
               </a:rPr>
-              <a:t>THREE-GATE COMMIT</a:t>
-            </a:r>
-          </a:p>
-          <a:p>
-            <a:pPr>
-              <a:lnSpc>
-                <a:spcPct val="100000"/>
-              </a:lnSpc>
-            </a:pPr>
-            <a:r>
-              <a:rPr sz="850">
-                <a:solidFill>
-                  <a:srgbClr val="202020"/>
-                </a:solidFill>
-                <a:latin typeface="Times New Roman"/>
-              </a:rPr>
-              <a:t>A frame is committed only when 307200 bytes arrived, all 300 source rows were written, and no packet failed. Otherwise the last good frame stays on screen and aborts + rows_max expose the reason.</a:t>
+              <a:t>CREATIVE DESIGN</a:t>
             </a:r>
           </a:p>
         </p:txBody>
@@ -4038,8 +4014,8 @@
         </p:nvSpPr>
         <p:spPr>
           <a:xfrm>
-            <a:off x="3931920" y="5504688"/>
-            <a:ext cx="3794760" cy="1005840"/>
+            <a:off x="3931920" y="4572000"/>
+            <a:ext cx="3794760" cy="932688"/>
           </a:xfrm>
           <a:prstGeom prst="roundRect">
             <a:avLst>
@@ -4085,7 +4061,7 @@
                 </a:solidFill>
                 <a:latin typeface="Arial"/>
               </a:rPr>
-              <a:t>SAME-FRAME A/B</a:t>
+              <a:t>THREE-GATE COMMIT</a:t>
             </a:r>
           </a:p>
           <a:p>
@@ -4101,30 +4077,34 @@
                 </a:solidFill>
                 <a:latin typeface="Times New Roman"/>
               </a:rPr>
-              <a:t>Original and processed panes share one source-coordinate stream, one row map and one 15-cycle effect chain. The seam is a per-pixel select; rotation or stacked effects cannot make the panes disagree.</a:t>
-            </a:r>
-          </a:p>
-        </p:txBody>
-      </p:sp>
-      <p:sp>
-        <p:nvSpPr>
-          <p:cNvPr id="27" name="Rectangle 26"/>
+              <a:t>A frame is committed only when 307200 bytes arrived, all 300 source rows were written, and no packet failed. Otherwise the last good frame stays on screen and aborts + rows_max expose the reason.</a:t>
+            </a:r>
+          </a:p>
+        </p:txBody>
+      </p:sp>
+      <p:sp>
+        <p:nvSpPr>
+          <p:cNvPr id="27" name="Rounded Rectangle 26"/>
           <p:cNvSpPr/>
           <p:nvPr/>
         </p:nvSpPr>
         <p:spPr>
           <a:xfrm>
-            <a:off x="7909560" y="1847088"/>
-            <a:ext cx="4023360" cy="347472"/>
-          </a:xfrm>
-          <a:prstGeom prst="rect">
-            <a:avLst/>
+            <a:off x="3931920" y="5577840"/>
+            <a:ext cx="3794760" cy="932688"/>
+          </a:xfrm>
+          <a:prstGeom prst="roundRect">
+            <a:avLst>
+              <a:gd name="adj" fmla="val 8000"/>
+            </a:avLst>
           </a:prstGeom>
           <a:solidFill>
-            <a:srgbClr val="1C1C1C"/>
+            <a:srgbClr val="FFFFFF"/>
           </a:solidFill>
-          <a:ln>
-            <a:noFill/>
+          <a:ln w="11430">
+            <a:solidFill>
+              <a:srgbClr val="AAAAAA"/>
+            </a:solidFill>
           </a:ln>
         </p:spPr>
         <p:style>
@@ -4142,77 +4122,58 @@
           </a:fontRef>
         </p:style>
         <p:txBody>
-          <a:bodyPr rtlCol="0" anchor="ctr" lIns="109728" rIns="73152" tIns="0" bIns="0"/>
-          <a:lstStyle/>
-          <a:p>
-            <a:pPr algn="l"/>
-            <a:r>
-              <a:rPr sz="1500" b="1">
-                <a:solidFill>
-                  <a:srgbClr val="FFFFFF"/>
-                </a:solidFill>
-                <a:latin typeface="Arial Black"/>
+          <a:bodyPr rtlCol="0" anchor="ctr" wrap="square" lIns="146304" rIns="128016" tIns="73152" bIns="54864"/>
+          <a:lstStyle/>
+          <a:p>
+            <a:pPr algn="ctr">
+              <a:spcAft>
+                <a:spcPts val="300"/>
+              </a:spcAft>
+            </a:pPr>
+            <a:r>
+              <a:rPr sz="1050" b="1">
+                <a:solidFill>
+                  <a:srgbClr val="7A2D5E"/>
+                </a:solidFill>
+                <a:latin typeface="Arial"/>
               </a:rPr>
-              <a:t>RESULT</a:t>
-            </a:r>
-          </a:p>
-        </p:txBody>
-      </p:sp>
-      <p:sp>
-        <p:nvSpPr>
-          <p:cNvPr id="28" name="TextBox 27"/>
-          <p:cNvSpPr txBox="1"/>
-          <p:nvPr/>
-        </p:nvSpPr>
-        <p:spPr>
-          <a:xfrm>
-            <a:off x="7955279" y="2267712"/>
-            <a:ext cx="3931920" cy="502920"/>
-          </a:xfrm>
-          <a:prstGeom prst="rect">
-            <a:avLst/>
-          </a:prstGeom>
-          <a:noFill/>
-        </p:spPr>
-        <p:txBody>
-          <a:bodyPr wrap="square" lIns="0" rIns="0" tIns="0" bIns="0" anchor="t">
-            <a:spAutoFit/>
-          </a:bodyPr>
-          <a:lstStyle/>
-          <a:p>
-            <a:pPr algn="l">
+              <a:t>SAME-FRAME A/B</a:t>
+            </a:r>
+          </a:p>
+          <a:p>
+            <a:pPr>
               <a:lnSpc>
                 <a:spcPct val="100000"/>
               </a:lnSpc>
             </a:pPr>
             <a:r>
-              <a:rPr sz="919" b="0">
+              <a:rPr sz="850">
                 <a:solidFill>
                   <a:srgbClr val="202020"/>
                 </a:solidFill>
                 <a:latin typeface="Times New Roman"/>
               </a:rPr>
-              <a:t>RGMII -&gt; HDMI entirely in PL; PS only control, SD playback and telemetry. 1024x600 at 59.5 Hz, 1 GbE UDP ingest.</a:t>
-            </a:r>
-          </a:p>
-        </p:txBody>
-      </p:sp>
-      <p:sp>
-        <p:nvSpPr>
-          <p:cNvPr id="29" name="Rectangle 28"/>
+              <a:t>The original tap is delay-aligned to the 15-cycle processed path; both panes share one coordinate stream and one row map. The seam is a per-pixel select; rotation or stacked effects cannot make the panes disagree.</a:t>
+            </a:r>
+          </a:p>
+        </p:txBody>
+      </p:sp>
+      <p:sp>
+        <p:nvSpPr>
+          <p:cNvPr id="28" name="Rectangle 27"/>
           <p:cNvSpPr/>
           <p:nvPr/>
         </p:nvSpPr>
         <p:spPr>
           <a:xfrm>
-            <a:off x="7955279" y="2880360"/>
-            <a:ext cx="3931920" cy="228600"/>
+            <a:off x="7909560" y="1847088"/>
+            <a:ext cx="4023360" cy="347472"/>
           </a:xfrm>
           <a:prstGeom prst="rect">
             <a:avLst/>
           </a:prstGeom>
           <a:solidFill>
-            <a:srgbClr val="F8F8F8"/>
+            <a:srgbClr val="1C1C1C"/>
           </a:solidFill>
           <a:ln>
             <a:noFill/>
@@ -4233,23 +4194,32 @@
           </a:fontRef>
         </p:style>
         <p:txBody>
-          <a:bodyPr rtlCol="0" anchor="ctr"/>
-          <a:lstStyle/>
-          <a:p>
-            <a:pPr algn="ctr"/>
-          </a:p>
-        </p:txBody>
-      </p:sp>
-      <p:sp>
-        <p:nvSpPr>
-          <p:cNvPr id="30" name="TextBox 29"/>
+          <a:bodyPr rtlCol="0" anchor="ctr" lIns="109728" rIns="73152" tIns="0" bIns="0"/>
+          <a:lstStyle/>
+          <a:p>
+            <a:pPr algn="l"/>
+            <a:r>
+              <a:rPr sz="1500" b="1">
+                <a:solidFill>
+                  <a:srgbClr val="FFFFFF"/>
+                </a:solidFill>
+                <a:latin typeface="Arial Black"/>
+              </a:rPr>
+              <a:t>RESULT</a:t>
+            </a:r>
+          </a:p>
+        </p:txBody>
+      </p:sp>
+      <p:sp>
+        <p:nvSpPr>
+          <p:cNvPr id="29" name="TextBox 28"/>
           <p:cNvSpPr txBox="1"/>
           <p:nvPr/>
         </p:nvSpPr>
         <p:spPr>
           <a:xfrm>
-            <a:off x="8010144" y="2907791"/>
-            <a:ext cx="1234440" cy="173736"/>
+            <a:off x="7955279" y="2267712"/>
+            <a:ext cx="3931920" cy="530352"/>
           </a:xfrm>
           <a:prstGeom prst="rect">
             <a:avLst/>
@@ -4268,72 +4238,33 @@
               </a:lnSpc>
             </a:pPr>
             <a:r>
-              <a:rPr sz="800" b="1">
-                <a:solidFill>
-                  <a:srgbClr val="5C5C5C"/>
-                </a:solidFill>
-                <a:latin typeface="Arial"/>
+              <a:rPr sz="890" b="0">
+                <a:solidFill>
+                  <a:srgbClr val="202020"/>
+                </a:solidFill>
+                <a:latin typeface="Times New Roman"/>
               </a:rPr>
-              <a:t>Setup WNS</a:t>
-            </a:r>
-          </a:p>
-        </p:txBody>
-      </p:sp>
-      <p:sp>
-        <p:nvSpPr>
-          <p:cNvPr id="31" name="TextBox 30"/>
-          <p:cNvSpPr txBox="1"/>
-          <p:nvPr/>
-        </p:nvSpPr>
-        <p:spPr>
-          <a:xfrm>
-            <a:off x="9235440" y="2907791"/>
-            <a:ext cx="2578608" cy="173736"/>
-          </a:xfrm>
-          <a:prstGeom prst="rect">
-            <a:avLst/>
-          </a:prstGeom>
-          <a:noFill/>
-        </p:spPr>
-        <p:txBody>
-          <a:bodyPr wrap="square" lIns="0" rIns="0" tIns="0" bIns="0" anchor="t">
-            <a:spAutoFit/>
-          </a:bodyPr>
-          <a:lstStyle/>
-          <a:p>
-            <a:pPr algn="l">
-              <a:lnSpc>
-                <a:spcPct val="100000"/>
-              </a:lnSpc>
-            </a:pPr>
-            <a:r>
-              <a:rPr sz="840" b="0">
-                <a:solidFill>
-                  <a:srgbClr val="202020"/>
-                </a:solidFill>
-                <a:latin typeface="Arial"/>
-              </a:rPr>
-              <a:t>1.341 ns  ·  0 failing endpoints</a:t>
-            </a:r>
-          </a:p>
-        </p:txBody>
-      </p:sp>
-      <p:sp>
-        <p:nvSpPr>
-          <p:cNvPr id="32" name="Rectangle 31"/>
+              <a:t>RGMII -&gt; HDMI entirely in PL; PS only control, SD playback and serial status. 1024x600 at 59.5 Hz; 74 Mb/s payload on 1 GbE; PL-internal latency 2-16 ms.</a:t>
+            </a:r>
+          </a:p>
+        </p:txBody>
+      </p:sp>
+      <p:sp>
+        <p:nvSpPr>
+          <p:cNvPr id="30" name="Rectangle 29"/>
           <p:cNvSpPr/>
           <p:nvPr/>
         </p:nvSpPr>
         <p:spPr>
           <a:xfrm>
-            <a:off x="7955279" y="3127248"/>
+            <a:off x="7955279" y="2880360"/>
             <a:ext cx="3931920" cy="228600"/>
           </a:xfrm>
           <a:prstGeom prst="rect">
             <a:avLst/>
           </a:prstGeom>
           <a:solidFill>
-            <a:srgbClr val="FFFFFF"/>
+            <a:srgbClr val="F8F8F8"/>
           </a:solidFill>
           <a:ln>
             <a:noFill/>
@@ -4363,13 +4294,13 @@
       </p:sp>
       <p:sp>
         <p:nvSpPr>
-          <p:cNvPr id="33" name="TextBox 32"/>
+          <p:cNvPr id="31" name="TextBox 30"/>
           <p:cNvSpPr txBox="1"/>
           <p:nvPr/>
         </p:nvSpPr>
         <p:spPr>
           <a:xfrm>
-            <a:off x="8010144" y="3154679"/>
+            <a:off x="8010144" y="2907791"/>
             <a:ext cx="1234440" cy="173736"/>
           </a:xfrm>
           <a:prstGeom prst="rect">
@@ -4389,26 +4320,26 @@
               </a:lnSpc>
             </a:pPr>
             <a:r>
-              <a:rPr sz="800" b="1">
+              <a:rPr sz="819" b="1">
                 <a:solidFill>
                   <a:srgbClr val="5C5C5C"/>
                 </a:solidFill>
                 <a:latin typeface="Arial"/>
               </a:rPr>
-              <a:t>Hold WHS</a:t>
-            </a:r>
-          </a:p>
-        </p:txBody>
-      </p:sp>
-      <p:sp>
-        <p:nvSpPr>
-          <p:cNvPr id="34" name="TextBox 33"/>
+              <a:t>Setup WNS</a:t>
+            </a:r>
+          </a:p>
+        </p:txBody>
+      </p:sp>
+      <p:sp>
+        <p:nvSpPr>
+          <p:cNvPr id="32" name="TextBox 31"/>
           <p:cNvSpPr txBox="1"/>
           <p:nvPr/>
         </p:nvSpPr>
         <p:spPr>
           <a:xfrm>
-            <a:off x="9235440" y="3154679"/>
+            <a:off x="9235440" y="2907791"/>
             <a:ext cx="2578608" cy="173736"/>
           </a:xfrm>
           <a:prstGeom prst="rect">
@@ -4428,33 +4359,33 @@
               </a:lnSpc>
             </a:pPr>
             <a:r>
-              <a:rPr sz="840" b="0">
+              <a:rPr sz="860" b="0">
                 <a:solidFill>
                   <a:srgbClr val="202020"/>
                 </a:solidFill>
                 <a:latin typeface="Arial"/>
               </a:rPr>
-              <a:t>0.025 ns  ·  positive margin</a:t>
-            </a:r>
-          </a:p>
-        </p:txBody>
-      </p:sp>
-      <p:sp>
-        <p:nvSpPr>
-          <p:cNvPr id="35" name="Rectangle 34"/>
+              <a:t>1.341 ns  ·  0 failing endpoints</a:t>
+            </a:r>
+          </a:p>
+        </p:txBody>
+      </p:sp>
+      <p:sp>
+        <p:nvSpPr>
+          <p:cNvPr id="33" name="Rectangle 32"/>
           <p:cNvSpPr/>
           <p:nvPr/>
         </p:nvSpPr>
         <p:spPr>
           <a:xfrm>
-            <a:off x="7955279" y="3374136"/>
+            <a:off x="7955279" y="3127248"/>
             <a:ext cx="3931920" cy="228600"/>
           </a:xfrm>
           <a:prstGeom prst="rect">
             <a:avLst/>
           </a:prstGeom>
           <a:solidFill>
-            <a:srgbClr val="F8F8F8"/>
+            <a:srgbClr val="FFFFFF"/>
           </a:solidFill>
           <a:ln>
             <a:noFill/>
@@ -4484,13 +4415,13 @@
       </p:sp>
       <p:sp>
         <p:nvSpPr>
-          <p:cNvPr id="36" name="TextBox 35"/>
+          <p:cNvPr id="34" name="TextBox 33"/>
           <p:cNvSpPr txBox="1"/>
           <p:nvPr/>
         </p:nvSpPr>
         <p:spPr>
           <a:xfrm>
-            <a:off x="8010144" y="3401568"/>
+            <a:off x="8010144" y="3154679"/>
             <a:ext cx="1234440" cy="173736"/>
           </a:xfrm>
           <a:prstGeom prst="rect">
@@ -4510,26 +4441,26 @@
               </a:lnSpc>
             </a:pPr>
             <a:r>
-              <a:rPr sz="800" b="1">
+              <a:rPr sz="819" b="1">
                 <a:solidFill>
                   <a:srgbClr val="5C5C5C"/>
                 </a:solidFill>
                 <a:latin typeface="Arial"/>
               </a:rPr>
-              <a:t>BRAM</a:t>
-            </a:r>
-          </a:p>
-        </p:txBody>
-      </p:sp>
-      <p:sp>
-        <p:nvSpPr>
-          <p:cNvPr id="37" name="TextBox 36"/>
+              <a:t>Hold WHS</a:t>
+            </a:r>
+          </a:p>
+        </p:txBody>
+      </p:sp>
+      <p:sp>
+        <p:nvSpPr>
+          <p:cNvPr id="35" name="TextBox 34"/>
           <p:cNvSpPr txBox="1"/>
           <p:nvPr/>
         </p:nvSpPr>
         <p:spPr>
           <a:xfrm>
-            <a:off x="9235440" y="3401568"/>
+            <a:off x="9235440" y="3154679"/>
             <a:ext cx="2578608" cy="173736"/>
           </a:xfrm>
           <a:prstGeom prst="rect">
@@ -4549,33 +4480,33 @@
               </a:lnSpc>
             </a:pPr>
             <a:r>
-              <a:rPr sz="840" b="0">
+              <a:rPr sz="860" b="0">
                 <a:solidFill>
                   <a:srgbClr val="202020"/>
                 </a:solidFill>
                 <a:latin typeface="Arial"/>
               </a:rPr>
-              <a:t>70.0%  ·  98 / 140 tiles</a:t>
-            </a:r>
-          </a:p>
-        </p:txBody>
-      </p:sp>
-      <p:sp>
-        <p:nvSpPr>
-          <p:cNvPr id="38" name="Rectangle 37"/>
+              <a:t>0.025 ns  ·  positive margin</a:t>
+            </a:r>
+          </a:p>
+        </p:txBody>
+      </p:sp>
+      <p:sp>
+        <p:nvSpPr>
+          <p:cNvPr id="36" name="Rectangle 35"/>
           <p:cNvSpPr/>
           <p:nvPr/>
         </p:nvSpPr>
         <p:spPr>
           <a:xfrm>
-            <a:off x="7955279" y="3621024"/>
+            <a:off x="7955279" y="3374136"/>
             <a:ext cx="3931920" cy="228600"/>
           </a:xfrm>
           <a:prstGeom prst="rect">
             <a:avLst/>
           </a:prstGeom>
           <a:solidFill>
-            <a:srgbClr val="FFFFFF"/>
+            <a:srgbClr val="F8F8F8"/>
           </a:solidFill>
           <a:ln>
             <a:noFill/>
@@ -4605,13 +4536,13 @@
       </p:sp>
       <p:sp>
         <p:nvSpPr>
-          <p:cNvPr id="39" name="TextBox 38"/>
+          <p:cNvPr id="37" name="TextBox 36"/>
           <p:cNvSpPr txBox="1"/>
           <p:nvPr/>
         </p:nvSpPr>
         <p:spPr>
           <a:xfrm>
-            <a:off x="8010144" y="3648456"/>
+            <a:off x="8010144" y="3401568"/>
             <a:ext cx="1234440" cy="173736"/>
           </a:xfrm>
           <a:prstGeom prst="rect">
@@ -4631,26 +4562,26 @@
               </a:lnSpc>
             </a:pPr>
             <a:r>
-              <a:rPr sz="800" b="1">
+              <a:rPr sz="819" b="1">
                 <a:solidFill>
                   <a:srgbClr val="5C5C5C"/>
                 </a:solidFill>
                 <a:latin typeface="Arial"/>
               </a:rPr>
-              <a:t>8 s stream</a:t>
-            </a:r>
-          </a:p>
-        </p:txBody>
-      </p:sp>
-      <p:sp>
-        <p:nvSpPr>
-          <p:cNvPr id="40" name="TextBox 39"/>
+              <a:t>BRAM</a:t>
+            </a:r>
+          </a:p>
+        </p:txBody>
+      </p:sp>
+      <p:sp>
+        <p:nvSpPr>
+          <p:cNvPr id="38" name="TextBox 37"/>
           <p:cNvSpPr txBox="1"/>
           <p:nvPr/>
         </p:nvSpPr>
         <p:spPr>
           <a:xfrm>
-            <a:off x="9235440" y="3648456"/>
+            <a:off x="9235440" y="3401568"/>
             <a:ext cx="2578608" cy="173736"/>
           </a:xfrm>
           <a:prstGeom prst="rect">
@@ -4670,33 +4601,33 @@
               </a:lnSpc>
             </a:pPr>
             <a:r>
-              <a:rPr sz="840" b="0">
+              <a:rPr sz="860" b="0">
                 <a:solidFill>
                   <a:srgbClr val="202020"/>
                 </a:solidFill>
                 <a:latin typeface="Arial"/>
               </a:rPr>
-              <a:t>241 frames  ·  29.95 fps</a:t>
-            </a:r>
-          </a:p>
-        </p:txBody>
-      </p:sp>
-      <p:sp>
-        <p:nvSpPr>
-          <p:cNvPr id="41" name="Rectangle 40"/>
+              <a:t>70.0%  ·  98 / 140 tiles</a:t>
+            </a:r>
+          </a:p>
+        </p:txBody>
+      </p:sp>
+      <p:sp>
+        <p:nvSpPr>
+          <p:cNvPr id="39" name="Rectangle 38"/>
           <p:cNvSpPr/>
           <p:nvPr/>
         </p:nvSpPr>
         <p:spPr>
           <a:xfrm>
-            <a:off x="7955279" y="3867912"/>
+            <a:off x="7955279" y="3621024"/>
             <a:ext cx="3931920" cy="228600"/>
           </a:xfrm>
           <a:prstGeom prst="rect">
             <a:avLst/>
           </a:prstGeom>
           <a:solidFill>
-            <a:srgbClr val="F8F8F8"/>
+            <a:srgbClr val="FFFFFF"/>
           </a:solidFill>
           <a:ln>
             <a:noFill/>
@@ -4726,13 +4657,13 @@
       </p:sp>
       <p:sp>
         <p:nvSpPr>
-          <p:cNvPr id="42" name="TextBox 41"/>
+          <p:cNvPr id="40" name="TextBox 39"/>
           <p:cNvSpPr txBox="1"/>
           <p:nvPr/>
         </p:nvSpPr>
         <p:spPr>
           <a:xfrm>
-            <a:off x="8010144" y="3895344"/>
+            <a:off x="8010144" y="3648456"/>
             <a:ext cx="1234440" cy="173736"/>
           </a:xfrm>
           <a:prstGeom prst="rect">
@@ -4752,26 +4683,26 @@
               </a:lnSpc>
             </a:pPr>
             <a:r>
-              <a:rPr sz="800" b="1">
+              <a:rPr sz="819" b="1">
                 <a:solidFill>
                   <a:srgbClr val="5C5C5C"/>
                 </a:solidFill>
                 <a:latin typeface="Arial"/>
               </a:rPr>
-              <a:t>UART battery</a:t>
-            </a:r>
-          </a:p>
-        </p:txBody>
-      </p:sp>
-      <p:sp>
-        <p:nvSpPr>
-          <p:cNvPr id="43" name="TextBox 42"/>
+              <a:t>8.05 s stream</a:t>
+            </a:r>
+          </a:p>
+        </p:txBody>
+      </p:sp>
+      <p:sp>
+        <p:nvSpPr>
+          <p:cNvPr id="41" name="TextBox 40"/>
           <p:cNvSpPr txBox="1"/>
           <p:nvPr/>
         </p:nvSpPr>
         <p:spPr>
           <a:xfrm>
-            <a:off x="9235440" y="3895344"/>
+            <a:off x="9235440" y="3648456"/>
             <a:ext cx="2578608" cy="173736"/>
           </a:xfrm>
           <a:prstGeom prst="rect">
@@ -4791,33 +4722,33 @@
               </a:lnSpc>
             </a:pPr>
             <a:r>
-              <a:rPr sz="840" b="0">
+              <a:rPr sz="860" b="0">
                 <a:solidFill>
                   <a:srgbClr val="202020"/>
                 </a:solidFill>
                 <a:latin typeface="Arial"/>
               </a:rPr>
-              <a:t>105 commands  ·  PASS</a:t>
-            </a:r>
-          </a:p>
-        </p:txBody>
-      </p:sp>
-      <p:sp>
-        <p:nvSpPr>
-          <p:cNvPr id="44" name="Rectangle 43"/>
+              <a:t>241 frames  ·  29.95 fps</a:t>
+            </a:r>
+          </a:p>
+        </p:txBody>
+      </p:sp>
+      <p:sp>
+        <p:nvSpPr>
+          <p:cNvPr id="42" name="Rectangle 41"/>
           <p:cNvSpPr/>
           <p:nvPr/>
         </p:nvSpPr>
         <p:spPr>
           <a:xfrm>
-            <a:off x="7955279" y="4114800"/>
+            <a:off x="7955279" y="3867912"/>
             <a:ext cx="3931920" cy="228600"/>
           </a:xfrm>
           <a:prstGeom prst="rect">
             <a:avLst/>
           </a:prstGeom>
           <a:solidFill>
-            <a:srgbClr val="FFFFFF"/>
+            <a:srgbClr val="F8F8F8"/>
           </a:solidFill>
           <a:ln>
             <a:noFill/>
@@ -4847,13 +4778,13 @@
       </p:sp>
       <p:sp>
         <p:nvSpPr>
-          <p:cNvPr id="45" name="TextBox 44"/>
+          <p:cNvPr id="43" name="TextBox 42"/>
           <p:cNvSpPr txBox="1"/>
           <p:nvPr/>
         </p:nvSpPr>
         <p:spPr>
           <a:xfrm>
-            <a:off x="8010144" y="4142232"/>
+            <a:off x="8010144" y="3895344"/>
             <a:ext cx="1234440" cy="173736"/>
           </a:xfrm>
           <a:prstGeom prst="rect">
@@ -4873,26 +4804,26 @@
               </a:lnSpc>
             </a:pPr>
             <a:r>
-              <a:rPr sz="800" b="1">
+              <a:rPr sz="819" b="1">
                 <a:solidFill>
                   <a:srgbClr val="5C5C5C"/>
                 </a:solidFill>
                 <a:latin typeface="Arial"/>
               </a:rPr>
-              <a:t>QSPI cold boot</a:t>
-            </a:r>
-          </a:p>
-        </p:txBody>
-      </p:sp>
-      <p:sp>
-        <p:nvSpPr>
-          <p:cNvPr id="46" name="TextBox 45"/>
+              <a:t>UART battery</a:t>
+            </a:r>
+          </a:p>
+        </p:txBody>
+      </p:sp>
+      <p:sp>
+        <p:nvSpPr>
+          <p:cNvPr id="44" name="TextBox 43"/>
           <p:cNvSpPr txBox="1"/>
           <p:nvPr/>
         </p:nvSpPr>
         <p:spPr>
           <a:xfrm>
-            <a:off x="9235440" y="4142232"/>
+            <a:off x="9235440" y="3895344"/>
             <a:ext cx="2578608" cy="173736"/>
           </a:xfrm>
           <a:prstGeom prst="rect">
@@ -4912,33 +4843,33 @@
               </a:lnSpc>
             </a:pPr>
             <a:r>
-              <a:rPr sz="840" b="0">
+              <a:rPr sz="860" b="0">
                 <a:solidFill>
                   <a:srgbClr val="202020"/>
                 </a:solidFill>
                 <a:latin typeface="Arial"/>
               </a:rPr>
-              <a:t>DONE / EOS  ·  no CRC error</a:t>
-            </a:r>
-          </a:p>
-        </p:txBody>
-      </p:sp>
-      <p:sp>
-        <p:nvSpPr>
-          <p:cNvPr id="47" name="Rectangle 46"/>
+              <a:t>105 commands  ·  PASS</a:t>
+            </a:r>
+          </a:p>
+        </p:txBody>
+      </p:sp>
+      <p:sp>
+        <p:nvSpPr>
+          <p:cNvPr id="45" name="Rectangle 44"/>
           <p:cNvSpPr/>
           <p:nvPr/>
         </p:nvSpPr>
         <p:spPr>
           <a:xfrm>
-            <a:off x="7955279" y="4361688"/>
+            <a:off x="7955279" y="4114800"/>
             <a:ext cx="3931920" cy="228600"/>
           </a:xfrm>
           <a:prstGeom prst="rect">
             <a:avLst/>
           </a:prstGeom>
           <a:solidFill>
-            <a:srgbClr val="F8F8F8"/>
+            <a:srgbClr val="FFFFFF"/>
           </a:solidFill>
           <a:ln>
             <a:noFill/>
@@ -4968,13 +4899,13 @@
       </p:sp>
       <p:sp>
         <p:nvSpPr>
-          <p:cNvPr id="48" name="TextBox 47"/>
+          <p:cNvPr id="46" name="TextBox 45"/>
           <p:cNvSpPr txBox="1"/>
           <p:nvPr/>
         </p:nvSpPr>
         <p:spPr>
           <a:xfrm>
-            <a:off x="8010144" y="4389120"/>
+            <a:off x="8010144" y="4142232"/>
             <a:ext cx="1234440" cy="173736"/>
           </a:xfrm>
           <a:prstGeom prst="rect">
@@ -4994,26 +4925,26 @@
               </a:lnSpc>
             </a:pPr>
             <a:r>
-              <a:rPr sz="800" b="1">
+              <a:rPr sz="819" b="1">
                 <a:solidFill>
                   <a:srgbClr val="5C5C5C"/>
                 </a:solidFill>
                 <a:latin typeface="Arial"/>
               </a:rPr>
-              <a:t>Fault injection</a:t>
-            </a:r>
-          </a:p>
-        </p:txBody>
-      </p:sp>
-      <p:sp>
-        <p:nvSpPr>
-          <p:cNvPr id="49" name="TextBox 48"/>
+              <a:t>QSPI cold boot</a:t>
+            </a:r>
+          </a:p>
+        </p:txBody>
+      </p:sp>
+      <p:sp>
+        <p:nvSpPr>
+          <p:cNvPr id="47" name="TextBox 46"/>
           <p:cNvSpPr txBox="1"/>
           <p:nvPr/>
         </p:nvSpPr>
         <p:spPr>
           <a:xfrm>
-            <a:off x="9235440" y="4389120"/>
+            <a:off x="9235440" y="4142232"/>
             <a:ext cx="2578608" cy="173736"/>
           </a:xfrm>
           <a:prstGeom prst="rect">
@@ -5033,33 +4964,33 @@
               </a:lnSpc>
             </a:pPr>
             <a:r>
-              <a:rPr sz="840" b="0">
+              <a:rPr sz="860" b="0">
                 <a:solidFill>
                   <a:srgbClr val="202020"/>
                 </a:solidFill>
                 <a:latin typeface="Arial"/>
               </a:rPr>
-              <a:t>22.0 / 0 / 18.9 fps  ·  PASS</a:t>
-            </a:r>
-          </a:p>
-        </p:txBody>
-      </p:sp>
-      <p:sp>
-        <p:nvSpPr>
-          <p:cNvPr id="50" name="Rectangle 49"/>
+              <a:t>DONE / EOS  ·  no CRC error</a:t>
+            </a:r>
+          </a:p>
+        </p:txBody>
+      </p:sp>
+      <p:sp>
+        <p:nvSpPr>
+          <p:cNvPr id="48" name="Rectangle 47"/>
           <p:cNvSpPr/>
           <p:nvPr/>
         </p:nvSpPr>
         <p:spPr>
           <a:xfrm>
-            <a:off x="7955279" y="4608576"/>
+            <a:off x="7955279" y="4361688"/>
             <a:ext cx="3931920" cy="228600"/>
           </a:xfrm>
           <a:prstGeom prst="rect">
             <a:avLst/>
           </a:prstGeom>
           <a:solidFill>
-            <a:srgbClr val="FFFFFF"/>
+            <a:srgbClr val="F8F8F8"/>
           </a:solidFill>
           <a:ln>
             <a:noFill/>
@@ -5089,13 +5020,13 @@
       </p:sp>
       <p:sp>
         <p:nvSpPr>
-          <p:cNvPr id="51" name="TextBox 50"/>
+          <p:cNvPr id="49" name="TextBox 48"/>
           <p:cNvSpPr txBox="1"/>
           <p:nvPr/>
         </p:nvSpPr>
         <p:spPr>
           <a:xfrm>
-            <a:off x="8010144" y="4636008"/>
+            <a:off x="8010144" y="4389120"/>
             <a:ext cx="1234440" cy="173736"/>
           </a:xfrm>
           <a:prstGeom prst="rect">
@@ -5115,26 +5046,26 @@
               </a:lnSpc>
             </a:pPr>
             <a:r>
-              <a:rPr sz="800" b="1">
+              <a:rPr sz="819" b="1">
                 <a:solidFill>
                   <a:srgbClr val="5C5C5C"/>
                 </a:solidFill>
                 <a:latin typeface="Arial"/>
               </a:rPr>
-              <a:t>LUT / FF / DSP</a:t>
-            </a:r>
-          </a:p>
-        </p:txBody>
-      </p:sp>
-      <p:sp>
-        <p:nvSpPr>
-          <p:cNvPr id="52" name="TextBox 51"/>
+              <a:t>Fault inject (C/L/R)</a:t>
+            </a:r>
+          </a:p>
+        </p:txBody>
+      </p:sp>
+      <p:sp>
+        <p:nvSpPr>
+          <p:cNvPr id="50" name="TextBox 49"/>
           <p:cNvSpPr txBox="1"/>
           <p:nvPr/>
         </p:nvSpPr>
         <p:spPr>
           <a:xfrm>
-            <a:off x="9235440" y="4636008"/>
+            <a:off x="9235440" y="4389120"/>
             <a:ext cx="2578608" cy="173736"/>
           </a:xfrm>
           <a:prstGeom prst="rect">
@@ -5154,118 +5085,36 @@
               </a:lnSpc>
             </a:pPr>
             <a:r>
-              <a:rPr sz="840" b="0">
+              <a:rPr sz="860" b="0">
                 <a:solidFill>
                   <a:srgbClr val="202020"/>
                 </a:solidFill>
                 <a:latin typeface="Arial"/>
               </a:rPr>
-              <a:t>28.13 / 8.55 / 8.64 %</a:t>
-            </a:r>
-          </a:p>
-        </p:txBody>
-      </p:sp>
-      <p:sp>
-        <p:nvSpPr>
-          <p:cNvPr id="53" name="TextBox 52"/>
-          <p:cNvSpPr txBox="1"/>
-          <p:nvPr/>
-        </p:nvSpPr>
-        <p:spPr>
-          <a:xfrm>
-            <a:off x="7955279" y="4965192"/>
-            <a:ext cx="3931920" cy="201168"/>
-          </a:xfrm>
-          <a:prstGeom prst="rect">
-            <a:avLst/>
-          </a:prstGeom>
-          <a:noFill/>
-        </p:spPr>
-        <p:txBody>
-          <a:bodyPr wrap="square" lIns="0" rIns="0" tIns="0" bIns="0" anchor="t">
-            <a:spAutoFit/>
-          </a:bodyPr>
-          <a:lstStyle/>
-          <a:p>
-            <a:pPr algn="l">
-              <a:lnSpc>
-                <a:spcPct val="100000"/>
-              </a:lnSpc>
-            </a:pPr>
-            <a:r>
-              <a:rPr sz="1050" b="1">
-                <a:solidFill>
-                  <a:srgbClr val="7A2D5E"/>
-                </a:solidFill>
-                <a:latin typeface="Arial Black"/>
-              </a:rPr>
-              <a:t>OBSERVABILITY</a:t>
-            </a:r>
-          </a:p>
-        </p:txBody>
-      </p:sp>
-      <p:sp>
-        <p:nvSpPr>
-          <p:cNvPr id="54" name="TextBox 53"/>
-          <p:cNvSpPr txBox="1"/>
-          <p:nvPr/>
-        </p:nvSpPr>
-        <p:spPr>
-          <a:xfrm>
-            <a:off x="7955279" y="5193792"/>
-            <a:ext cx="3931920" cy="530352"/>
-          </a:xfrm>
-          <a:prstGeom prst="rect">
-            <a:avLst/>
-          </a:prstGeom>
-          <a:noFill/>
-        </p:spPr>
-        <p:txBody>
-          <a:bodyPr wrap="square" lIns="0" rIns="0" tIns="0" bIns="0" anchor="t">
-            <a:spAutoFit/>
-          </a:bodyPr>
-          <a:lstStyle/>
-          <a:p>
-            <a:pPr algn="l">
-              <a:lnSpc>
-                <a:spcPct val="100000"/>
-              </a:lnSpc>
-            </a:pPr>
-            <a:r>
-              <a:rPr sz="860" b="0">
-                <a:solidFill>
-                  <a:srgbClr val="202020"/>
-                </a:solidFill>
-                <a:latin typeface="Times New Roman"/>
-              </a:rPr>
-              <a:t>link / 1 Hz UDP telemetry: aborts, rows_max, stall, gap_min/max and pane_bad. The same counters are readable over UART, JTAG and the wire.</a:t>
-            </a:r>
-          </a:p>
-        </p:txBody>
-      </p:sp>
-      <p:sp>
-        <p:nvSpPr>
-          <p:cNvPr id="55" name="Rounded Rectangle 54"/>
+              <a:t>22.0 / 0 / 18.9 fps  ·  PASS</a:t>
+            </a:r>
+          </a:p>
+        </p:txBody>
+      </p:sp>
+      <p:sp>
+        <p:nvSpPr>
+          <p:cNvPr id="51" name="Rectangle 50"/>
           <p:cNvSpPr/>
           <p:nvPr/>
         </p:nvSpPr>
         <p:spPr>
           <a:xfrm>
-            <a:off x="7955279" y="5797296"/>
-            <a:ext cx="3931920" cy="365760"/>
-          </a:xfrm>
-          <a:prstGeom prst="roundRect">
-            <a:avLst>
-              <a:gd name="adj" fmla="val 15000"/>
-            </a:avLst>
+            <a:off x="7955279" y="4608576"/>
+            <a:ext cx="3931920" cy="228600"/>
+          </a:xfrm>
+          <a:prstGeom prst="rect">
+            <a:avLst/>
           </a:prstGeom>
           <a:solidFill>
-            <a:srgbClr val="F5ECF1"/>
+            <a:srgbClr val="FFFFFF"/>
           </a:solidFill>
-          <a:ln w="11430">
-            <a:solidFill>
-              <a:srgbClr val="7A2D5E"/>
-            </a:solidFill>
+          <a:ln>
+            <a:noFill/>
           </a:ln>
         </p:spPr>
         <p:style>
@@ -5283,32 +5132,23 @@
           </a:fontRef>
         </p:style>
         <p:txBody>
-          <a:bodyPr rtlCol="0" anchor="ctr" lIns="109728" tIns="0" bIns="0"/>
+          <a:bodyPr rtlCol="0" anchor="ctr"/>
           <a:lstStyle/>
           <a:p>
             <a:pPr algn="ctr"/>
-            <a:r>
-              <a:rPr sz="860" b="1">
-                <a:solidFill>
-                  <a:srgbClr val="7A2D5E"/>
-                </a:solidFill>
-                <a:latin typeface="Arial"/>
-              </a:rPr>
-              <a:t>DROP 1 IN 100  -&gt;  ABORTS RISE  -&gt;  RECOVERY</a:t>
-            </a:r>
-          </a:p>
-        </p:txBody>
-      </p:sp>
-      <p:sp>
-        <p:nvSpPr>
-          <p:cNvPr id="56" name="TextBox 55"/>
+          </a:p>
+        </p:txBody>
+      </p:sp>
+      <p:sp>
+        <p:nvSpPr>
+          <p:cNvPr id="52" name="TextBox 51"/>
           <p:cNvSpPr txBox="1"/>
           <p:nvPr/>
         </p:nvSpPr>
         <p:spPr>
           <a:xfrm>
-            <a:off x="7955279" y="6254496"/>
-            <a:ext cx="3931920" cy="256032"/>
+            <a:off x="8010144" y="4636008"/>
+            <a:ext cx="1234440" cy="173736"/>
           </a:xfrm>
           <a:prstGeom prst="rect">
             <a:avLst/>
@@ -5327,20 +5167,215 @@
               </a:lnSpc>
             </a:pPr>
             <a:r>
-              <a:rPr sz="670" b="0">
+              <a:rPr sz="819" b="1">
                 <a:solidFill>
                   <a:srgbClr val="5C5C5C"/>
+                </a:solidFill>
+                <a:latin typeface="Arial"/>
+              </a:rPr>
+              <a:t>LUT / FF / DSP</a:t>
+            </a:r>
+          </a:p>
+        </p:txBody>
+      </p:sp>
+      <p:sp>
+        <p:nvSpPr>
+          <p:cNvPr id="53" name="TextBox 52"/>
+          <p:cNvSpPr txBox="1"/>
+          <p:nvPr/>
+        </p:nvSpPr>
+        <p:spPr>
+          <a:xfrm>
+            <a:off x="9235440" y="4636008"/>
+            <a:ext cx="2578608" cy="173736"/>
+          </a:xfrm>
+          <a:prstGeom prst="rect">
+            <a:avLst/>
+          </a:prstGeom>
+          <a:noFill/>
+        </p:spPr>
+        <p:txBody>
+          <a:bodyPr wrap="square" lIns="0" rIns="0" tIns="0" bIns="0" anchor="t">
+            <a:spAutoFit/>
+          </a:bodyPr>
+          <a:lstStyle/>
+          <a:p>
+            <a:pPr algn="l">
+              <a:lnSpc>
+                <a:spcPct val="100000"/>
+              </a:lnSpc>
+            </a:pPr>
+            <a:r>
+              <a:rPr sz="860" b="0">
+                <a:solidFill>
+                  <a:srgbClr val="202020"/>
+                </a:solidFill>
+                <a:latin typeface="Arial"/>
+              </a:rPr>
+              <a:t>28.13 / 8.55 / 8.64 %</a:t>
+            </a:r>
+          </a:p>
+        </p:txBody>
+      </p:sp>
+      <p:sp>
+        <p:nvSpPr>
+          <p:cNvPr id="54" name="TextBox 53"/>
+          <p:cNvSpPr txBox="1"/>
+          <p:nvPr/>
+        </p:nvSpPr>
+        <p:spPr>
+          <a:xfrm>
+            <a:off x="7955279" y="4965192"/>
+            <a:ext cx="3931920" cy="201168"/>
+          </a:xfrm>
+          <a:prstGeom prst="rect">
+            <a:avLst/>
+          </a:prstGeom>
+          <a:noFill/>
+        </p:spPr>
+        <p:txBody>
+          <a:bodyPr wrap="square" lIns="0" rIns="0" tIns="0" bIns="0" anchor="t">
+            <a:spAutoFit/>
+          </a:bodyPr>
+          <a:lstStyle/>
+          <a:p>
+            <a:pPr algn="l">
+              <a:lnSpc>
+                <a:spcPct val="100000"/>
+              </a:lnSpc>
+            </a:pPr>
+            <a:r>
+              <a:rPr sz="1050" b="1">
+                <a:solidFill>
+                  <a:srgbClr val="7A2D5E"/>
+                </a:solidFill>
+                <a:latin typeface="Arial Black"/>
+              </a:rPr>
+              <a:t>OBSERVABILITY</a:t>
+            </a:r>
+          </a:p>
+        </p:txBody>
+      </p:sp>
+      <p:sp>
+        <p:nvSpPr>
+          <p:cNvPr id="55" name="TextBox 54"/>
+          <p:cNvSpPr txBox="1"/>
+          <p:nvPr/>
+        </p:nvSpPr>
+        <p:spPr>
+          <a:xfrm>
+            <a:off x="7955279" y="5175504"/>
+            <a:ext cx="3931920" cy="530352"/>
+          </a:xfrm>
+          <a:prstGeom prst="rect">
+            <a:avLst/>
+          </a:prstGeom>
+          <a:noFill/>
+        </p:spPr>
+        <p:txBody>
+          <a:bodyPr wrap="square" lIns="0" rIns="0" tIns="0" bIns="0" anchor="t">
+            <a:spAutoFit/>
+          </a:bodyPr>
+          <a:lstStyle/>
+          <a:p>
+            <a:pPr algn="l">
+              <a:lnSpc>
+                <a:spcPct val="100000"/>
+              </a:lnSpc>
+            </a:pPr>
+            <a:r>
+              <a:rPr sz="819" b="0">
+                <a:solidFill>
+                  <a:srgbClr val="202020"/>
                 </a:solidFill>
                 <a:latin typeface="Times New Roman"/>
               </a:rPr>
-              <a:t>Conclusion: one frame, two panes, one wire-readable account.  Next: 1080p, dual-stream, close RGMII TX hold.</a:t>
+              <a:t>UART link gives stall and gap_min/max; the 1 Hz PL UDP beacon gives frames, packets, aborts, rows_max, pane_bad and latency. Both read the same counters.</a:t>
+            </a:r>
+          </a:p>
+        </p:txBody>
+      </p:sp>
+      <p:sp>
+        <p:nvSpPr>
+          <p:cNvPr id="56" name="TextBox 55"/>
+          <p:cNvSpPr txBox="1"/>
+          <p:nvPr/>
+        </p:nvSpPr>
+        <p:spPr>
+          <a:xfrm>
+            <a:off x="7955279" y="5669280"/>
+            <a:ext cx="3931920" cy="182880"/>
+          </a:xfrm>
+          <a:prstGeom prst="rect">
+            <a:avLst/>
+          </a:prstGeom>
+          <a:noFill/>
+        </p:spPr>
+        <p:txBody>
+          <a:bodyPr wrap="square" lIns="0" rIns="0" tIns="0" bIns="0" anchor="t">
+            <a:spAutoFit/>
+          </a:bodyPr>
+          <a:lstStyle/>
+          <a:p>
+            <a:pPr algn="l">
+              <a:lnSpc>
+                <a:spcPct val="100000"/>
+              </a:lnSpc>
+            </a:pPr>
+            <a:r>
+              <a:rPr sz="840" b="1">
+                <a:solidFill>
+                  <a:srgbClr val="7A2D5E"/>
+                </a:solidFill>
+                <a:latin typeface="Arial"/>
+              </a:rPr>
+              <a:t>CONCLUSION / NEXT</a:t>
+            </a:r>
+          </a:p>
+        </p:txBody>
+      </p:sp>
+      <p:sp>
+        <p:nvSpPr>
+          <p:cNvPr id="57" name="TextBox 56"/>
+          <p:cNvSpPr txBox="1"/>
+          <p:nvPr/>
+        </p:nvSpPr>
+        <p:spPr>
+          <a:xfrm>
+            <a:off x="7955279" y="5897880"/>
+            <a:ext cx="3931920" cy="566928"/>
+          </a:xfrm>
+          <a:prstGeom prst="rect">
+            <a:avLst/>
+          </a:prstGeom>
+          <a:noFill/>
+        </p:spPr>
+        <p:txBody>
+          <a:bodyPr wrap="square" lIns="0" rIns="0" tIns="0" bIns="0" anchor="t">
+            <a:spAutoFit/>
+          </a:bodyPr>
+          <a:lstStyle/>
+          <a:p>
+            <a:pPr algn="l">
+              <a:lnSpc>
+                <a:spcPct val="100000"/>
+              </a:lnSpc>
+            </a:pPr>
+            <a:r>
+              <a:rPr sz="800" b="0">
+                <a:solidFill>
+                  <a:srgbClr val="202020"/>
+                </a:solidFill>
+                <a:latin typeface="Times New Roman"/>
+              </a:rPr>
+              <a:t>One frame, two panes, one wire-readable account. Next: close RGMII TX hold margin; larger device for higher resolution.</a:t>
             </a:r>
           </a:p>
         </p:txBody>
       </p:sp>
       <p:cxnSp>
         <p:nvCxnSpPr>
-          <p:cNvPr id="57" name="Connector 56"/>
+          <p:cNvPr id="58" name="Connector 57"/>
           <p:cNvCxnSpPr/>
           <p:nvPr/>
         </p:nvCxnSpPr>
@@ -5375,7 +5410,7 @@
       </p:cxnSp>
       <p:sp>
         <p:nvSpPr>
-          <p:cNvPr id="58" name="TextBox 57"/>
+          <p:cNvPr id="59" name="TextBox 58"/>
           <p:cNvSpPr txBox="1"/>
           <p:nvPr/>
         </p:nvSpPr>
@@ -5414,7 +5449,7 @@
       </p:sp>
       <p:pic>
         <p:nvPicPr>
-          <p:cNvPr id="59" name="Picture 58" descr="amd_logo_black.png"/>
+          <p:cNvPr id="60" name="Picture 59" descr="amd_logo_black.png"/>
           <p:cNvPicPr>
             <a:picLocks noChangeAspect="1"/>
           </p:cNvPicPr>
